--- a/outputs/deliverables/2026-09-02_日本語スライド生成テスト.pptx
+++ b/outputs/deliverables/2026-09-02_日本語スライド生成テスト.pptx
@@ -3735,7 +3735,7 @@
                 <a:ea typeface="Yu Gothic"/>
                 <a:cs typeface="Yu Gothic"/>
               </a:rPr>
-              <a:t>mybrain-starter Vault ／ テスト出力 ／ 2026-09-02</a:t>
+              <a:t>mybrain-starter Vault ／ テスト出力 ／ 2026-09-02（再ビルド）</a:t>
             </a:r>
           </a:p>
         </p:txBody>
@@ -4458,7 +4458,7 @@
                 <a:ea typeface="Yu Gothic"/>
                 <a:cs typeface="Yu Gothic"/>
               </a:rPr>
-              <a:t>Noto Sans CJK JP</a:t>
+              <a:t>Noto Sans CJK JP（要設定）</a:t>
             </a:r>
           </a:p>
         </p:txBody>
@@ -4499,8 +4499,8 @@
                 <a:ea typeface="Yu Gothic"/>
                 <a:cs typeface="Yu Gothic"/>
               </a:rPr>
-              <a:t>日本語が豆腐（□）にも
-文字化けにもならなかった。</a:t>
+              <a:t>既定では簡体字の SC 面が
+選ばれるため JP を優先させた。</a:t>
             </a:r>
           </a:p>
         </p:txBody>
@@ -4852,7 +4852,7 @@
                           <a:ea typeface="Yu Gothic"/>
                           <a:cs typeface="Yu Gothic"/>
                         </a:rPr>
-                        <a:t>フォントの見え方</a:t>
+                        <a:t>フォントの字形</a:t>
                       </a:r>
                     </a:p>
                   </a:txBody>
@@ -4877,7 +4877,7 @@
                           <a:ea typeface="Yu Gothic"/>
                           <a:cs typeface="Yu Gothic"/>
                         </a:rPr>
-                        <a:t>指定した Yu Gothic はこの環境に無く代替された</a:t>
+                        <a:t>既定では中国語字形の SC 面が選ばれていた（設定で修正）</a:t>
                       </a:r>
                     </a:p>
                   </a:txBody>
@@ -4953,7 +4953,7 @@
                 <a:ea typeface="Yu Gothic"/>
                 <a:cs typeface="Yu Gothic"/>
               </a:rPr>
-              <a:t>※ 判定は、この Linux 環境（LibreOffice 24.2.7 / Noto Sans CJK JP）での結果。Yu Gothic を持つ Windows・Mac の PowerPoint 実機での字面は未確認。</a:t>
+              <a:t>※ PDF の /BaseFont を実測した値は NotoSansCJKjp-Regular ／ -Bold。fontconfig を設定する前は NotoSansCJKsc（簡体字）が埋め込まれていた。</a:t>
             </a:r>
           </a:p>
         </p:txBody>
@@ -5363,10 +5363,10 @@
                 <a:cs typeface="Yu Gothic"/>
               </a:rPr>
               <a:t>指定フォントの Yu Gothic は
-この環境に無く、PDF は
-Noto Sans CJK JP で描かれている。
-PowerPoint 実機での字面と改行位置は
-確認できていない。</a:t>
+この環境に無い。fontconfig を
+設定するまで、PDF には簡体字の
+NotoSansCJKsc が埋め込まれていた。
+PowerPoint 実機での字面は未確認。</a:t>
             </a:r>
           </a:p>
         </p:txBody>
